--- a/examples/nature.pptx
+++ b/examples/nature.pptx
@@ -14,6 +14,7 @@
     <p:sldId id="262" r:id="rId13"/>
     <p:sldId id="263" r:id="rId14"/>
     <p:sldId id="264" r:id="rId15"/>
+    <p:sldId id="265" r:id="rId16"/>
   </p:sldIdLst>
   <p:sldSz cx="12192000" cy="6858000" type="screen4x3"/>
   <p:notesSz cx="6858000" cy="9144000"/>
@@ -3959,7 +3960,7 @@
         <p:spPr>
           <a:xfrm>
             <a:off x="8188225" y="4760416"/>
-            <a:ext cx="866775" cy="276225"/>
+            <a:ext cx="619125" cy="276225"/>
           </a:xfrm>
           <a:prstGeom prst="roundRect">
             <a:avLst>
@@ -4004,8 +4005,8 @@
         </p:nvSpPr>
         <p:spPr>
           <a:xfrm>
-            <a:off x="9131200" y="4760416"/>
-            <a:ext cx="619125" cy="276225"/>
+            <a:off x="8883550" y="4760416"/>
+            <a:ext cx="866775" cy="276225"/>
           </a:xfrm>
           <a:prstGeom prst="roundRect">
             <a:avLst>
@@ -4051,7 +4052,7 @@
         <p:spPr>
           <a:xfrm>
             <a:off x="9826525" y="4760416"/>
-            <a:ext cx="742950" cy="276225"/>
+            <a:ext cx="619125" cy="276225"/>
           </a:xfrm>
           <a:prstGeom prst="roundRect">
             <a:avLst>
@@ -4097,7 +4098,7 @@
         <p:spPr>
           <a:xfrm>
             <a:off x="8188225" y="5112841"/>
-            <a:ext cx="495300" cy="276225"/>
+            <a:ext cx="742950" cy="276225"/>
           </a:xfrm>
           <a:prstGeom prst="roundRect">
             <a:avLst>
@@ -4134,9 +4135,55 @@
           <a:p/>
         </p:txBody>
       </p:sp>
+      <p:sp>
+        <p:nvSpPr>
+          <p:cNvPr id="27" name="Rounded Rectangle 26"/>
+          <p:cNvSpPr/>
+          <p:nvPr/>
+        </p:nvSpPr>
+        <p:spPr>
+          <a:xfrm>
+            <a:off x="9007375" y="5112841"/>
+            <a:ext cx="495300" cy="276225"/>
+          </a:xfrm>
+          <a:prstGeom prst="roundRect">
+            <a:avLst>
+              <a:gd name="adj" fmla="val 50000"/>
+            </a:avLst>
+          </a:prstGeom>
+          <a:noFill/>
+          <a:ln w="9525">
+            <a:solidFill>
+              <a:srgbClr val="3B5D45">
+                <a:alpha val="35000"/>
+              </a:srgbClr>
+            </a:solidFill>
+          </a:ln>
+          <a:effectLst/>
+        </p:spPr>
+        <p:style>
+          <a:lnRef idx="1">
+            <a:schemeClr val="accent1"/>
+          </a:lnRef>
+          <a:fillRef idx="3">
+            <a:schemeClr val="accent1"/>
+          </a:fillRef>
+          <a:effectRef idx="2">
+            <a:schemeClr val="accent1"/>
+          </a:effectRef>
+          <a:fontRef idx="minor">
+            <a:schemeClr val="lt1"/>
+          </a:fontRef>
+        </p:style>
+        <p:txBody>
+          <a:bodyPr rtlCol="0" anchor="ctr"/>
+          <a:lstStyle/>
+          <a:p/>
+        </p:txBody>
+      </p:sp>
       <p:pic>
         <p:nvPicPr>
-          <p:cNvPr id="27" name="Picture 26" descr="icon-leaf-848b7db140.png"/>
+          <p:cNvPr id="28" name="Picture 27" descr="icon-leaf-848b7db140.png"/>
           <p:cNvPicPr>
             <a:picLocks noChangeAspect="1"/>
           </p:cNvPicPr>
@@ -4160,7 +4207,7 @@
       </p:pic>
       <p:pic>
         <p:nvPicPr>
-          <p:cNvPr id="28" name="Picture 27" descr="icon-users-d6ff8fc006.png"/>
+          <p:cNvPr id="29" name="Picture 28" descr="icon-users-d6ff8fc006.png"/>
           <p:cNvPicPr>
             <a:picLocks noChangeAspect="1"/>
           </p:cNvPicPr>
@@ -4184,7 +4231,7 @@
       </p:pic>
       <p:pic>
         <p:nvPicPr>
-          <p:cNvPr id="29" name="Picture 28" descr="icon-compass-4949d4dd52.png"/>
+          <p:cNvPr id="30" name="Picture 29" descr="icon-compass-4949d4dd52.png"/>
           <p:cNvPicPr>
             <a:picLocks noChangeAspect="1"/>
           </p:cNvPicPr>
@@ -4208,7 +4255,7 @@
       </p:pic>
       <p:pic>
         <p:nvPicPr>
-          <p:cNvPr id="30" name="Picture 29" descr="icon-compass-4949d4dd52.png"/>
+          <p:cNvPr id="31" name="Picture 30" descr="icon-compass-4949d4dd52.png"/>
           <p:cNvPicPr>
             <a:picLocks noChangeAspect="1"/>
           </p:cNvPicPr>
@@ -4232,7 +4279,7 @@
       </p:pic>
       <p:sp>
         <p:nvSpPr>
-          <p:cNvPr id="31" name="TextBox 30"/>
+          <p:cNvPr id="32" name="TextBox 31"/>
           <p:cNvSpPr txBox="1"/>
           <p:nvPr/>
         </p:nvSpPr>
@@ -4272,7 +4319,7 @@
       </p:sp>
       <p:sp>
         <p:nvSpPr>
-          <p:cNvPr id="32" name="TextBox 31"/>
+          <p:cNvPr id="33" name="TextBox 32"/>
           <p:cNvSpPr txBox="1"/>
           <p:nvPr/>
         </p:nvSpPr>
@@ -4312,7 +4359,7 @@
       </p:sp>
       <p:sp>
         <p:nvSpPr>
-          <p:cNvPr id="33" name="TextBox 32"/>
+          <p:cNvPr id="34" name="TextBox 33"/>
           <p:cNvSpPr txBox="1"/>
           <p:nvPr/>
         </p:nvSpPr>
@@ -4352,7 +4399,7 @@
       </p:sp>
       <p:sp>
         <p:nvSpPr>
-          <p:cNvPr id="34" name="TextBox 33"/>
+          <p:cNvPr id="35" name="TextBox 34"/>
           <p:cNvSpPr txBox="1"/>
           <p:nvPr/>
         </p:nvSpPr>
@@ -4392,7 +4439,7 @@
       </p:sp>
       <p:sp>
         <p:nvSpPr>
-          <p:cNvPr id="35" name="TextBox 34"/>
+          <p:cNvPr id="36" name="TextBox 35"/>
           <p:cNvSpPr txBox="1"/>
           <p:nvPr/>
         </p:nvSpPr>
@@ -4434,7 +4481,7 @@
       </p:sp>
       <p:sp>
         <p:nvSpPr>
-          <p:cNvPr id="36" name="TextBox 35"/>
+          <p:cNvPr id="37" name="TextBox 36"/>
           <p:cNvSpPr txBox="1"/>
           <p:nvPr/>
         </p:nvSpPr>
@@ -4476,7 +4523,7 @@
       </p:sp>
       <p:sp>
         <p:nvSpPr>
-          <p:cNvPr id="37" name="TextBox 36"/>
+          <p:cNvPr id="38" name="TextBox 37"/>
           <p:cNvSpPr txBox="1"/>
           <p:nvPr/>
         </p:nvSpPr>
@@ -4518,7 +4565,7 @@
       </p:sp>
       <p:sp>
         <p:nvSpPr>
-          <p:cNvPr id="38" name="TextBox 37"/>
+          <p:cNvPr id="39" name="TextBox 38"/>
           <p:cNvSpPr txBox="1"/>
           <p:nvPr/>
         </p:nvSpPr>
@@ -4560,7 +4607,7 @@
       </p:sp>
       <p:sp>
         <p:nvSpPr>
-          <p:cNvPr id="39" name="TextBox 38"/>
+          <p:cNvPr id="40" name="TextBox 39"/>
           <p:cNvSpPr txBox="1"/>
           <p:nvPr/>
         </p:nvSpPr>
@@ -4602,7 +4649,7 @@
       </p:sp>
       <p:sp>
         <p:nvSpPr>
-          <p:cNvPr id="40" name="TextBox 39"/>
+          <p:cNvPr id="41" name="TextBox 40"/>
           <p:cNvSpPr txBox="1"/>
           <p:nvPr/>
         </p:nvSpPr>
@@ -4642,7 +4689,7 @@
       </p:sp>
       <p:sp>
         <p:nvSpPr>
-          <p:cNvPr id="41" name="TextBox 40"/>
+          <p:cNvPr id="42" name="TextBox 41"/>
           <p:cNvSpPr txBox="1"/>
           <p:nvPr/>
         </p:nvSpPr>
@@ -4682,7 +4729,7 @@
       </p:sp>
       <p:sp>
         <p:nvSpPr>
-          <p:cNvPr id="42" name="TextBox 41"/>
+          <p:cNvPr id="43" name="TextBox 42"/>
           <p:cNvSpPr txBox="1"/>
           <p:nvPr/>
         </p:nvSpPr>
@@ -4722,7 +4769,7 @@
       </p:sp>
       <p:sp>
         <p:nvSpPr>
-          <p:cNvPr id="43" name="TextBox 42"/>
+          <p:cNvPr id="44" name="TextBox 43"/>
           <p:cNvSpPr txBox="1"/>
           <p:nvPr/>
         </p:nvSpPr>
@@ -4762,7 +4809,7 @@
       </p:sp>
       <p:sp>
         <p:nvSpPr>
-          <p:cNvPr id="44" name="TextBox 43"/>
+          <p:cNvPr id="45" name="TextBox 44"/>
           <p:cNvSpPr txBox="1"/>
           <p:nvPr/>
         </p:nvSpPr>
@@ -4802,7 +4849,7 @@
       </p:sp>
       <p:sp>
         <p:nvSpPr>
-          <p:cNvPr id="45" name="TextBox 44"/>
+          <p:cNvPr id="46" name="TextBox 45"/>
           <p:cNvSpPr txBox="1"/>
           <p:nvPr/>
         </p:nvSpPr>
@@ -4842,7 +4889,7 @@
       </p:sp>
       <p:sp>
         <p:nvSpPr>
-          <p:cNvPr id="46" name="TextBox 45"/>
+          <p:cNvPr id="47" name="TextBox 46"/>
           <p:cNvSpPr txBox="1"/>
           <p:nvPr/>
         </p:nvSpPr>
@@ -4882,7 +4929,7 @@
       </p:sp>
       <p:sp>
         <p:nvSpPr>
-          <p:cNvPr id="47" name="TextBox 46"/>
+          <p:cNvPr id="48" name="TextBox 47"/>
           <p:cNvSpPr txBox="1"/>
           <p:nvPr/>
         </p:nvSpPr>
@@ -4922,7 +4969,7 @@
       </p:sp>
       <p:sp>
         <p:nvSpPr>
-          <p:cNvPr id="48" name="TextBox 47"/>
+          <p:cNvPr id="49" name="TextBox 48"/>
           <p:cNvSpPr txBox="1"/>
           <p:nvPr/>
         </p:nvSpPr>
@@ -4962,7 +5009,7 @@
       </p:sp>
       <p:sp>
         <p:nvSpPr>
-          <p:cNvPr id="49" name="TextBox 48"/>
+          <p:cNvPr id="50" name="TextBox 49"/>
           <p:cNvSpPr txBox="1"/>
           <p:nvPr/>
         </p:nvSpPr>
@@ -5002,7 +5049,7 @@
       </p:sp>
       <p:sp>
         <p:nvSpPr>
-          <p:cNvPr id="50" name="TextBox 49"/>
+          <p:cNvPr id="51" name="TextBox 50"/>
           <p:cNvSpPr txBox="1"/>
           <p:nvPr/>
         </p:nvSpPr>
@@ -5037,14 +5084,14 @@
                 <a:latin typeface="Noto Sans TC"/>
                 <a:ea typeface="Noto Sans TC"/>
               </a:rPr>
-              <a:t>留白大（頁邊 96px）· 每頁 ≤45 字</a:t>
-            </a:r>
-          </a:p>
-        </p:txBody>
-      </p:sp>
-      <p:sp>
-        <p:nvSpPr>
-          <p:cNvPr id="51" name="TextBox 50"/>
+              <a:t>留白大（頁邊 96px）· 字級不縮，裝不下就拆頁</a:t>
+            </a:r>
+          </a:p>
+        </p:txBody>
+      </p:sp>
+      <p:sp>
+        <p:nvSpPr>
+          <p:cNvPr id="52" name="TextBox 51"/>
           <p:cNvSpPr txBox="1"/>
           <p:nvPr/>
         </p:nvSpPr>
@@ -5084,7 +5131,7 @@
       </p:sp>
       <p:sp>
         <p:nvSpPr>
-          <p:cNvPr id="52" name="TextBox 51"/>
+          <p:cNvPr id="53" name="TextBox 52"/>
           <p:cNvSpPr txBox="1"/>
           <p:nvPr/>
         </p:nvSpPr>
@@ -5124,7 +5171,7 @@
       </p:sp>
       <p:sp>
         <p:nvSpPr>
-          <p:cNvPr id="53" name="TextBox 52"/>
+          <p:cNvPr id="54" name="TextBox 53"/>
           <p:cNvSpPr txBox="1"/>
           <p:nvPr/>
         </p:nvSpPr>
@@ -5164,7 +5211,7 @@
       </p:sp>
       <p:sp>
         <p:nvSpPr>
-          <p:cNvPr id="54" name="TextBox 53"/>
+          <p:cNvPr id="55" name="TextBox 54"/>
           <p:cNvSpPr txBox="1"/>
           <p:nvPr/>
         </p:nvSpPr>
@@ -5204,7 +5251,7 @@
       </p:sp>
       <p:sp>
         <p:nvSpPr>
-          <p:cNvPr id="55" name="TextBox 54"/>
+          <p:cNvPr id="56" name="TextBox 55"/>
           <p:cNvSpPr txBox="1"/>
           <p:nvPr/>
         </p:nvSpPr>
@@ -5244,14 +5291,14 @@
       </p:sp>
       <p:sp>
         <p:nvSpPr>
-          <p:cNvPr id="56" name="TextBox 55"/>
+          <p:cNvPr id="57" name="TextBox 56"/>
           <p:cNvSpPr txBox="1"/>
           <p:nvPr/>
         </p:nvSpPr>
         <p:spPr>
           <a:xfrm>
             <a:off x="8188225" y="4760416"/>
-            <a:ext cx="923925" cy="314325"/>
+            <a:ext cx="676275" cy="314325"/>
           </a:xfrm>
           <a:prstGeom prst="rect">
             <a:avLst/>
@@ -5277,21 +5324,21 @@
                 <a:latin typeface="Noto Sans TC"/>
                 <a:ea typeface="Noto Sans TC"/>
               </a:rPr>
-              <a:t>一頁一數字</a:t>
-            </a:r>
-          </a:p>
-        </p:txBody>
-      </p:sp>
-      <p:sp>
-        <p:nvSpPr>
-          <p:cNvPr id="57" name="TextBox 56"/>
-          <p:cNvSpPr txBox="1"/>
-          <p:nvPr/>
-        </p:nvSpPr>
-        <p:spPr>
-          <a:xfrm>
-            <a:off x="9131200" y="4760416"/>
-            <a:ext cx="676275" cy="314325"/>
+              <a:t>長文頁</a:t>
+            </a:r>
+          </a:p>
+        </p:txBody>
+      </p:sp>
+      <p:sp>
+        <p:nvSpPr>
+          <p:cNvPr id="58" name="TextBox 57"/>
+          <p:cNvSpPr txBox="1"/>
+          <p:nvPr/>
+        </p:nvSpPr>
+        <p:spPr>
+          <a:xfrm>
+            <a:off x="8883550" y="4760416"/>
+            <a:ext cx="923925" cy="314325"/>
           </a:xfrm>
           <a:prstGeom prst="rect">
             <a:avLst/>
@@ -5317,21 +5364,21 @@
                 <a:latin typeface="Noto Sans TC"/>
                 <a:ea typeface="Noto Sans TC"/>
               </a:rPr>
-              <a:t>章節頁</a:t>
-            </a:r>
-          </a:p>
-        </p:txBody>
-      </p:sp>
-      <p:sp>
-        <p:nvSpPr>
-          <p:cNvPr id="58" name="TextBox 57"/>
+              <a:t>一頁一數字</a:t>
+            </a:r>
+          </a:p>
+        </p:txBody>
+      </p:sp>
+      <p:sp>
+        <p:nvSpPr>
+          <p:cNvPr id="59" name="TextBox 58"/>
           <p:cNvSpPr txBox="1"/>
           <p:nvPr/>
         </p:nvSpPr>
         <p:spPr>
           <a:xfrm>
             <a:off x="9826525" y="4760416"/>
-            <a:ext cx="800100" cy="314325"/>
+            <a:ext cx="676275" cy="314325"/>
           </a:xfrm>
           <a:prstGeom prst="rect">
             <a:avLst/>
@@ -5357,21 +5404,21 @@
                 <a:latin typeface="Noto Sans TC"/>
                 <a:ea typeface="Noto Sans TC"/>
               </a:rPr>
-              <a:t>步驟流程</a:t>
-            </a:r>
-          </a:p>
-        </p:txBody>
-      </p:sp>
-      <p:sp>
-        <p:nvSpPr>
-          <p:cNvPr id="59" name="TextBox 58"/>
+              <a:t>章節頁</a:t>
+            </a:r>
+          </a:p>
+        </p:txBody>
+      </p:sp>
+      <p:sp>
+        <p:nvSpPr>
+          <p:cNvPr id="60" name="TextBox 59"/>
           <p:cNvSpPr txBox="1"/>
           <p:nvPr/>
         </p:nvSpPr>
         <p:spPr>
           <a:xfrm>
             <a:off x="8188225" y="5112841"/>
-            <a:ext cx="552450" cy="314325"/>
+            <a:ext cx="800100" cy="314325"/>
           </a:xfrm>
           <a:prstGeom prst="rect">
             <a:avLst/>
@@ -5397,6 +5444,46 @@
                 <a:latin typeface="Noto Sans TC"/>
                 <a:ea typeface="Noto Sans TC"/>
               </a:rPr>
+              <a:t>步驟流程</a:t>
+            </a:r>
+          </a:p>
+        </p:txBody>
+      </p:sp>
+      <p:sp>
+        <p:nvSpPr>
+          <p:cNvPr id="61" name="TextBox 60"/>
+          <p:cNvSpPr txBox="1"/>
+          <p:nvPr/>
+        </p:nvSpPr>
+        <p:spPr>
+          <a:xfrm>
+            <a:off x="9007375" y="5112841"/>
+            <a:ext cx="552450" cy="314325"/>
+          </a:xfrm>
+          <a:prstGeom prst="rect">
+            <a:avLst/>
+          </a:prstGeom>
+          <a:noFill/>
+        </p:spPr>
+        <p:txBody>
+          <a:bodyPr wrap="square" lIns="0" rIns="0" tIns="0" bIns="0" anchor="t">
+            <a:spAutoFit/>
+          </a:bodyPr>
+          <a:lstStyle/>
+          <a:p>
+            <a:pPr algn="l">
+              <a:lnSpc>
+                <a:spcPts val="2175"/>
+              </a:lnSpc>
+            </a:pPr>
+            <a:r>
+              <a:rPr sz="975" b="0">
+                <a:solidFill>
+                  <a:srgbClr val="3B5D45"/>
+                </a:solidFill>
+                <a:latin typeface="Noto Sans TC"/>
+                <a:ea typeface="Noto Sans TC"/>
+              </a:rPr>
               <a:t>封底</a:t>
             </a:r>
           </a:p>
@@ -5404,7 +5491,7 @@
       </p:sp>
       <p:sp>
         <p:nvSpPr>
-          <p:cNvPr id="60" name="TextBox 59"/>
+          <p:cNvPr id="62" name="TextBox 61"/>
           <p:cNvSpPr txBox="1"/>
           <p:nvPr/>
         </p:nvSpPr>
@@ -5438,6 +5525,248 @@
                 <a:ea typeface="Noto Sans TC"/>
               </a:rPr>
               <a:t>01</a:t>
+            </a:r>
+          </a:p>
+        </p:txBody>
+      </p:sp>
+    </p:spTree>
+  </p:cSld>
+  <p:clrMapOvr>
+    <a:masterClrMapping/>
+  </p:clrMapOvr>
+</p:sld>
+</file>
+
+<file path=ppt/slides/slide10.xml><?xml version="1.0" encoding="utf-8"?>
+<p:sld xmlns:a="http://schemas.openxmlformats.org/drawingml/2006/main" xmlns:p="http://schemas.openxmlformats.org/presentationml/2006/main" xmlns:r="http://schemas.openxmlformats.org/officeDocument/2006/relationships">
+  <p:cSld>
+    <p:spTree>
+      <p:nvGrpSpPr>
+        <p:cNvPr id="1" name=""/>
+        <p:cNvGrpSpPr/>
+        <p:nvPr/>
+      </p:nvGrpSpPr>
+      <p:grpSpPr/>
+      <p:pic>
+        <p:nvPicPr>
+          <p:cNvPr id="2" name="Picture 1" descr="nature-1-bake.jpg"/>
+          <p:cNvPicPr>
+            <a:picLocks noChangeAspect="1"/>
+          </p:cNvPicPr>
+          <p:nvPr/>
+        </p:nvPicPr>
+        <p:blipFill>
+          <a:blip r:embed="rId2"/>
+          <a:stretch>
+            <a:fillRect/>
+          </a:stretch>
+        </p:blipFill>
+        <p:spPr>
+          <a:xfrm>
+            <a:off x="0" y="0"/>
+            <a:ext cx="12192000" cy="6858000"/>
+          </a:xfrm>
+          <a:prstGeom prst="rect">
+            <a:avLst/>
+          </a:prstGeom>
+        </p:spPr>
+      </p:pic>
+      <p:sp>
+        <p:nvSpPr>
+          <p:cNvPr id="3" name="TextBox 2"/>
+          <p:cNvSpPr txBox="1"/>
+          <p:nvPr/>
+        </p:nvSpPr>
+        <p:spPr>
+          <a:xfrm>
+            <a:off x="914400" y="533400"/>
+            <a:ext cx="1388417" cy="200025"/>
+          </a:xfrm>
+          <a:prstGeom prst="rect">
+            <a:avLst/>
+          </a:prstGeom>
+          <a:noFill/>
+        </p:spPr>
+        <p:txBody>
+          <a:bodyPr wrap="square" lIns="0" rIns="0" tIns="0" bIns="0" anchor="t">
+            <a:spAutoFit/>
+          </a:bodyPr>
+          <a:lstStyle/>
+          <a:p>
+            <a:pPr algn="l">
+              <a:lnSpc>
+                <a:spcPts val="1275"/>
+              </a:lnSpc>
+            </a:pPr>
+            <a:r>
+              <a:rPr sz="900" b="0" spc="179">
+                <a:solidFill>
+                  <a:srgbClr val="3B5D45"/>
+                </a:solidFill>
+                <a:latin typeface="Noto Sans TC"/>
+                <a:ea typeface="Noto Sans TC"/>
+              </a:rPr>
+              <a:t>山徑選物 · 品牌故事</a:t>
+            </a:r>
+          </a:p>
+        </p:txBody>
+      </p:sp>
+      <p:sp>
+        <p:nvSpPr>
+          <p:cNvPr id="4" name="TextBox 3"/>
+          <p:cNvSpPr txBox="1"/>
+          <p:nvPr/>
+        </p:nvSpPr>
+        <p:spPr>
+          <a:xfrm>
+            <a:off x="10385970" y="533400"/>
+            <a:ext cx="948779" cy="266700"/>
+          </a:xfrm>
+          <a:prstGeom prst="rect">
+            <a:avLst/>
+          </a:prstGeom>
+          <a:noFill/>
+        </p:spPr>
+        <p:txBody>
+          <a:bodyPr wrap="square" lIns="0" rIns="0" tIns="0" bIns="0" anchor="t">
+            <a:spAutoFit/>
+          </a:bodyPr>
+          <a:lstStyle/>
+          <a:p>
+            <a:pPr algn="l">
+              <a:lnSpc>
+                <a:spcPts val="1800"/>
+              </a:lnSpc>
+            </a:pPr>
+            <a:r>
+              <a:rPr sz="1350" b="0" spc="405">
+                <a:solidFill>
+                  <a:srgbClr val="3B5D45"/>
+                </a:solidFill>
+                <a:latin typeface="LXGW WenKai TC"/>
+                <a:ea typeface="LXGW WenKai TC"/>
+              </a:rPr>
+              <a:t>山徑選物</a:t>
+            </a:r>
+          </a:p>
+        </p:txBody>
+      </p:sp>
+      <p:sp>
+        <p:nvSpPr>
+          <p:cNvPr id="5" name="TextBox 4"/>
+          <p:cNvSpPr txBox="1"/>
+          <p:nvPr/>
+        </p:nvSpPr>
+        <p:spPr>
+          <a:xfrm>
+            <a:off x="914400" y="2829817"/>
+            <a:ext cx="10420350" cy="533400"/>
+          </a:xfrm>
+          <a:prstGeom prst="rect">
+            <a:avLst/>
+          </a:prstGeom>
+          <a:noFill/>
+        </p:spPr>
+        <p:txBody>
+          <a:bodyPr wrap="square" lIns="0" rIns="0" tIns="0" bIns="0" anchor="t">
+            <a:spAutoFit/>
+          </a:bodyPr>
+          <a:lstStyle/>
+          <a:p>
+            <a:pPr algn="l">
+              <a:lnSpc>
+                <a:spcPts val="3900"/>
+              </a:lnSpc>
+            </a:pPr>
+            <a:r>
+              <a:rPr sz="3000" b="0">
+                <a:solidFill>
+                  <a:srgbClr val="3B5D45"/>
+                </a:solidFill>
+                <a:latin typeface="LXGW WenKai TC"/>
+                <a:ea typeface="LXGW WenKai TC"/>
+              </a:rPr>
+              <a:t>慢慢選，慢慢用。</a:t>
+            </a:r>
+          </a:p>
+        </p:txBody>
+      </p:sp>
+      <p:sp>
+        <p:nvSpPr>
+          <p:cNvPr id="6" name="TextBox 5"/>
+          <p:cNvSpPr txBox="1"/>
+          <p:nvPr/>
+        </p:nvSpPr>
+        <p:spPr>
+          <a:xfrm>
+            <a:off x="914400" y="3629917"/>
+            <a:ext cx="10420350" cy="436215"/>
+          </a:xfrm>
+          <a:prstGeom prst="rect">
+            <a:avLst/>
+          </a:prstGeom>
+          <a:noFill/>
+        </p:spPr>
+        <p:txBody>
+          <a:bodyPr wrap="square" lIns="0" rIns="0" tIns="0" bIns="0" anchor="t">
+            <a:spAutoFit/>
+          </a:bodyPr>
+          <a:lstStyle/>
+          <a:p>
+            <a:pPr algn="l">
+              <a:lnSpc>
+                <a:spcPts val="3135"/>
+              </a:lnSpc>
+            </a:pPr>
+            <a:r>
+              <a:rPr sz="1650" b="0">
+                <a:solidFill>
+                  <a:srgbClr val="3B5D45"/>
+                </a:solidFill>
+                <a:latin typeface="Noto Sans TC"/>
+                <a:ea typeface="Noto Sans TC"/>
+              </a:rPr>
+              <a:t>hello@mountaintrail.example（示意，換成你的）</a:t>
+            </a:r>
+          </a:p>
+        </p:txBody>
+      </p:sp>
+      <p:sp>
+        <p:nvSpPr>
+          <p:cNvPr id="7" name="TextBox 6"/>
+          <p:cNvSpPr txBox="1"/>
+          <p:nvPr/>
+        </p:nvSpPr>
+        <p:spPr>
+          <a:xfrm>
+            <a:off x="11129367" y="6362700"/>
+            <a:ext cx="205382" cy="228600"/>
+          </a:xfrm>
+          <a:prstGeom prst="rect">
+            <a:avLst/>
+          </a:prstGeom>
+          <a:noFill/>
+        </p:spPr>
+        <p:txBody>
+          <a:bodyPr wrap="square" lIns="0" rIns="0" tIns="0" bIns="0" anchor="t">
+            <a:spAutoFit/>
+          </a:bodyPr>
+          <a:lstStyle/>
+          <a:p>
+            <a:pPr algn="l">
+              <a:lnSpc>
+                <a:spcPts val="1500"/>
+              </a:lnSpc>
+            </a:pPr>
+            <a:r>
+              <a:rPr sz="1050" b="0">
+                <a:solidFill>
+                  <a:srgbClr val="3B5D45"/>
+                </a:solidFill>
+                <a:latin typeface="Noto Sans TC"/>
+                <a:ea typeface="Noto Sans TC"/>
+              </a:rPr>
+              <a:t>10</a:t>
             </a:r>
           </a:p>
         </p:txBody>
@@ -7346,34 +7675,34 @@
         </p:nvSpPr>
         <p:spPr>
           <a:xfrm>
-            <a:off x="914400" y="1922115"/>
-            <a:ext cx="10420350" cy="1943100"/>
-          </a:xfrm>
-          <a:prstGeom prst="rect">
-            <a:avLst/>
-          </a:prstGeom>
-          <a:noFill/>
-        </p:spPr>
-        <p:txBody>
-          <a:bodyPr wrap="square" lIns="0" rIns="0" tIns="0" bIns="0" anchor="t">
-            <a:spAutoFit/>
-          </a:bodyPr>
-          <a:lstStyle/>
-          <a:p>
-            <a:pPr algn="l">
-              <a:lnSpc>
-                <a:spcPts val="15000"/>
-              </a:lnSpc>
-            </a:pPr>
-            <a:r>
-              <a:rPr sz="15000" b="0">
-                <a:solidFill>
-                  <a:srgbClr val="B0603A"/>
+            <a:off x="914400" y="914400"/>
+            <a:ext cx="10420350" cy="533400"/>
+          </a:xfrm>
+          <a:prstGeom prst="rect">
+            <a:avLst/>
+          </a:prstGeom>
+          <a:noFill/>
+        </p:spPr>
+        <p:txBody>
+          <a:bodyPr wrap="square" lIns="0" rIns="0" tIns="0" bIns="0" anchor="t">
+            <a:spAutoFit/>
+          </a:bodyPr>
+          <a:lstStyle/>
+          <a:p>
+            <a:pPr algn="l">
+              <a:lnSpc>
+                <a:spcPts val="3900"/>
+              </a:lnSpc>
+            </a:pPr>
+            <a:r>
+              <a:rPr sz="3000" b="0">
+                <a:solidFill>
+                  <a:srgbClr val="3B5D45"/>
                 </a:solidFill>
                 <a:latin typeface="LXGW WenKai TC"/>
                 <a:ea typeface="LXGW WenKai TC"/>
               </a:rPr>
-              <a:t>27 家</a:t>
+              <a:t>內文多的時候</a:t>
             </a:r>
           </a:p>
         </p:txBody>
@@ -7386,8 +7715,8 @@
         </p:nvSpPr>
         <p:spPr>
           <a:xfrm>
-            <a:off x="914400" y="4055715"/>
-            <a:ext cx="6153150" cy="436215"/>
+            <a:off x="914400" y="1941314"/>
+            <a:ext cx="9963150" cy="834330"/>
           </a:xfrm>
           <a:prstGeom prst="rect">
             <a:avLst/>
@@ -7413,7 +7742,7 @@
                 <a:latin typeface="Noto Sans TC"/>
                 <a:ea typeface="Noto Sans TC"/>
               </a:rPr>
-              <a:t>長期合作的小工坊。</a:t>
+              <a:t>這一頁是假字，用來示範內文很多的時候版面長什麼樣。字級還是 22，行距照大腦的設定，段落一段接一段往下排，不因為字多就把字縮小，也不把留白吃掉。</a:t>
             </a:r>
           </a:p>
         </p:txBody>
@@ -7426,36 +7755,34 @@
         </p:nvSpPr>
         <p:spPr>
           <a:xfrm>
-            <a:off x="914400" y="4682430"/>
-            <a:ext cx="6153150" cy="291405"/>
-          </a:xfrm>
-          <a:prstGeom prst="rect">
-            <a:avLst/>
-          </a:prstGeom>
-          <a:noFill/>
-        </p:spPr>
-        <p:txBody>
-          <a:bodyPr wrap="square" lIns="0" rIns="0" tIns="0" bIns="0" anchor="t">
-            <a:spAutoFit/>
-          </a:bodyPr>
-          <a:lstStyle/>
-          <a:p>
-            <a:pPr algn="l">
-              <a:lnSpc>
-                <a:spcPts val="1995"/>
-              </a:lnSpc>
-            </a:pPr>
-            <a:r>
-              <a:rPr sz="1050" b="0">
-                <a:solidFill>
-                  <a:srgbClr val="3B5D45">
-                    <a:alpha val="85000"/>
-                  </a:srgbClr>
+            <a:off x="914400" y="2908994"/>
+            <a:ext cx="9963150" cy="834330"/>
+          </a:xfrm>
+          <a:prstGeom prst="rect">
+            <a:avLst/>
+          </a:prstGeom>
+          <a:noFill/>
+        </p:spPr>
+        <p:txBody>
+          <a:bodyPr wrap="square" lIns="0" rIns="0" tIns="0" bIns="0" anchor="t">
+            <a:spAutoFit/>
+          </a:bodyPr>
+          <a:lstStyle/>
+          <a:p>
+            <a:pPr algn="l">
+              <a:lnSpc>
+                <a:spcPts val="3135"/>
+              </a:lnSpc>
+            </a:pPr>
+            <a:r>
+              <a:rPr sz="1650" b="0">
+                <a:solidFill>
+                  <a:srgbClr val="25302A"/>
                 </a:solidFill>
                 <a:latin typeface="Noto Sans TC"/>
                 <a:ea typeface="Noto Sans TC"/>
               </a:rPr>
-              <a:t>示意數字，換成你的。</a:t>
+              <a:t>假字假字，這裡通常會放一段背景說明：為什麼要做這件事、之前試過什麼、現在卡在哪裡。寫的時候一段只講一個重點，讀的人才跟得上，講的人也不會念到一半迷路。</a:t>
             </a:r>
           </a:p>
         </p:txBody>
@@ -7463,6 +7790,86 @@
       <p:sp>
         <p:nvSpPr>
           <p:cNvPr id="8" name="TextBox 7"/>
+          <p:cNvSpPr txBox="1"/>
+          <p:nvPr/>
+        </p:nvSpPr>
+        <p:spPr>
+          <a:xfrm>
+            <a:off x="914400" y="3876675"/>
+            <a:ext cx="9963150" cy="834330"/>
+          </a:xfrm>
+          <a:prstGeom prst="rect">
+            <a:avLst/>
+          </a:prstGeom>
+          <a:noFill/>
+        </p:spPr>
+        <p:txBody>
+          <a:bodyPr wrap="square" lIns="0" rIns="0" tIns="0" bIns="0" anchor="t">
+            <a:spAutoFit/>
+          </a:bodyPr>
+          <a:lstStyle/>
+          <a:p>
+            <a:pPr algn="l">
+              <a:lnSpc>
+                <a:spcPts val="3135"/>
+              </a:lnSpc>
+            </a:pPr>
+            <a:r>
+              <a:rPr sz="1650" b="0">
+                <a:solidFill>
+                  <a:srgbClr val="25302A"/>
+                </a:solidFill>
+                <a:latin typeface="Noto Sans TC"/>
+                <a:ea typeface="Noto Sans TC"/>
+              </a:rPr>
+              <a:t>內文到這個量大概就是一頁的上限。再多就拆成兩頁，或改用三欄重點、步驟流程把重點並列；不要縮字硬塞，也不要把行距壓扁，那樣看起來就不像同一份簡報了。</a:t>
+            </a:r>
+          </a:p>
+        </p:txBody>
+      </p:sp>
+      <p:sp>
+        <p:nvSpPr>
+          <p:cNvPr id="9" name="TextBox 8"/>
+          <p:cNvSpPr txBox="1"/>
+          <p:nvPr/>
+        </p:nvSpPr>
+        <p:spPr>
+          <a:xfrm>
+            <a:off x="914400" y="4844355"/>
+            <a:ext cx="9963150" cy="834330"/>
+          </a:xfrm>
+          <a:prstGeom prst="rect">
+            <a:avLst/>
+          </a:prstGeom>
+          <a:noFill/>
+        </p:spPr>
+        <p:txBody>
+          <a:bodyPr wrap="square" lIns="0" rIns="0" tIns="0" bIns="0" anchor="t">
+            <a:spAutoFit/>
+          </a:bodyPr>
+          <a:lstStyle/>
+          <a:p>
+            <a:pPr algn="l">
+              <a:lnSpc>
+                <a:spcPts val="3135"/>
+              </a:lnSpc>
+            </a:pPr>
+            <a:r>
+              <a:rPr sz="1650" b="0">
+                <a:solidFill>
+                  <a:srgbClr val="25302A"/>
+                </a:solidFill>
+                <a:latin typeface="Noto Sans TC"/>
+                <a:ea typeface="Noto Sans TC"/>
+              </a:rPr>
+              <a:t>最後一段留給補充：數字要有出處、名詞前後一致、日期用絕對值。這些寫在大腦的禁區裡，AI 排版時會照做，你交件前只要對一次就好。</a:t>
+            </a:r>
+          </a:p>
+        </p:txBody>
+      </p:sp>
+      <p:sp>
+        <p:nvSpPr>
+          <p:cNvPr id="10" name="TextBox 9"/>
           <p:cNvSpPr txBox="1"/>
           <p:nvPr/>
         </p:nvSpPr>
@@ -7550,6 +7957,46 @@
         </p:nvSpPr>
         <p:spPr>
           <a:xfrm>
+            <a:off x="914400" y="533400"/>
+            <a:ext cx="1388417" cy="200025"/>
+          </a:xfrm>
+          <a:prstGeom prst="rect">
+            <a:avLst/>
+          </a:prstGeom>
+          <a:noFill/>
+        </p:spPr>
+        <p:txBody>
+          <a:bodyPr wrap="square" lIns="0" rIns="0" tIns="0" bIns="0" anchor="t">
+            <a:spAutoFit/>
+          </a:bodyPr>
+          <a:lstStyle/>
+          <a:p>
+            <a:pPr algn="l">
+              <a:lnSpc>
+                <a:spcPts val="1275"/>
+              </a:lnSpc>
+            </a:pPr>
+            <a:r>
+              <a:rPr sz="900" b="0" spc="179">
+                <a:solidFill>
+                  <a:srgbClr val="3B5D45"/>
+                </a:solidFill>
+                <a:latin typeface="Noto Sans TC"/>
+                <a:ea typeface="Noto Sans TC"/>
+              </a:rPr>
+              <a:t>山徑選物 · 品牌故事</a:t>
+            </a:r>
+          </a:p>
+        </p:txBody>
+      </p:sp>
+      <p:sp>
+        <p:nvSpPr>
+          <p:cNvPr id="4" name="TextBox 3"/>
+          <p:cNvSpPr txBox="1"/>
+          <p:nvPr/>
+        </p:nvSpPr>
+        <p:spPr>
+          <a:xfrm>
             <a:off x="10385970" y="533400"/>
             <a:ext cx="948779" cy="266700"/>
           </a:xfrm>
@@ -7584,82 +8031,40 @@
       </p:sp>
       <p:sp>
         <p:nvSpPr>
-          <p:cNvPr id="4" name="TextBox 3"/>
-          <p:cNvSpPr txBox="1"/>
-          <p:nvPr/>
-        </p:nvSpPr>
-        <p:spPr>
-          <a:xfrm>
-            <a:off x="914400" y="2472630"/>
-            <a:ext cx="10420350" cy="1181100"/>
-          </a:xfrm>
-          <a:prstGeom prst="rect">
-            <a:avLst/>
-          </a:prstGeom>
-          <a:noFill/>
-        </p:spPr>
-        <p:txBody>
-          <a:bodyPr wrap="square" lIns="0" rIns="0" tIns="0" bIns="0" anchor="t">
-            <a:spAutoFit/>
-          </a:bodyPr>
-          <a:lstStyle/>
-          <a:p>
-            <a:pPr algn="l">
-              <a:lnSpc>
-                <a:spcPts val="9000"/>
-              </a:lnSpc>
-            </a:pPr>
-            <a:r>
-              <a:rPr sz="9000" b="0">
-                <a:solidFill>
-                  <a:srgbClr val="3B5D45">
-                    <a:alpha val="35000"/>
-                  </a:srgbClr>
+          <p:cNvPr id="5" name="TextBox 4"/>
+          <p:cNvSpPr txBox="1"/>
+          <p:nvPr/>
+        </p:nvSpPr>
+        <p:spPr>
+          <a:xfrm>
+            <a:off x="914400" y="1922115"/>
+            <a:ext cx="10420350" cy="1943100"/>
+          </a:xfrm>
+          <a:prstGeom prst="rect">
+            <a:avLst/>
+          </a:prstGeom>
+          <a:noFill/>
+        </p:spPr>
+        <p:txBody>
+          <a:bodyPr wrap="square" lIns="0" rIns="0" tIns="0" bIns="0" anchor="t">
+            <a:spAutoFit/>
+          </a:bodyPr>
+          <a:lstStyle/>
+          <a:p>
+            <a:pPr algn="l">
+              <a:lnSpc>
+                <a:spcPts val="15000"/>
+              </a:lnSpc>
+            </a:pPr>
+            <a:r>
+              <a:rPr sz="15000" b="0">
+                <a:solidFill>
+                  <a:srgbClr val="B0603A"/>
                 </a:solidFill>
                 <a:latin typeface="LXGW WenKai TC"/>
                 <a:ea typeface="LXGW WenKai TC"/>
               </a:rPr>
-              <a:t>02</a:t>
-            </a:r>
-          </a:p>
-        </p:txBody>
-      </p:sp>
-      <p:sp>
-        <p:nvSpPr>
-          <p:cNvPr id="5" name="TextBox 4"/>
-          <p:cNvSpPr txBox="1"/>
-          <p:nvPr/>
-        </p:nvSpPr>
-        <p:spPr>
-          <a:xfrm>
-            <a:off x="914400" y="3691830"/>
-            <a:ext cx="10420350" cy="731490"/>
-          </a:xfrm>
-          <a:prstGeom prst="rect">
-            <a:avLst/>
-          </a:prstGeom>
-          <a:noFill/>
-        </p:spPr>
-        <p:txBody>
-          <a:bodyPr wrap="square" lIns="0" rIns="0" tIns="0" bIns="0" anchor="t">
-            <a:spAutoFit/>
-          </a:bodyPr>
-          <a:lstStyle/>
-          <a:p>
-            <a:pPr algn="l">
-              <a:lnSpc>
-                <a:spcPts val="5459"/>
-              </a:lnSpc>
-            </a:pPr>
-            <a:r>
-              <a:rPr sz="4200" b="0">
-                <a:solidFill>
-                  <a:srgbClr val="3B5D45"/>
-                </a:solidFill>
-                <a:latin typeface="LXGW WenKai TC"/>
-                <a:ea typeface="LXGW WenKai TC"/>
-              </a:rPr>
-              <a:t>合作</a:t>
+              <a:t>27 家</a:t>
             </a:r>
           </a:p>
         </p:txBody>
@@ -7667,6 +8072,88 @@
       <p:sp>
         <p:nvSpPr>
           <p:cNvPr id="6" name="TextBox 5"/>
+          <p:cNvSpPr txBox="1"/>
+          <p:nvPr/>
+        </p:nvSpPr>
+        <p:spPr>
+          <a:xfrm>
+            <a:off x="914400" y="4055715"/>
+            <a:ext cx="6153150" cy="436215"/>
+          </a:xfrm>
+          <a:prstGeom prst="rect">
+            <a:avLst/>
+          </a:prstGeom>
+          <a:noFill/>
+        </p:spPr>
+        <p:txBody>
+          <a:bodyPr wrap="square" lIns="0" rIns="0" tIns="0" bIns="0" anchor="t">
+            <a:spAutoFit/>
+          </a:bodyPr>
+          <a:lstStyle/>
+          <a:p>
+            <a:pPr algn="l">
+              <a:lnSpc>
+                <a:spcPts val="3135"/>
+              </a:lnSpc>
+            </a:pPr>
+            <a:r>
+              <a:rPr sz="1650" b="0">
+                <a:solidFill>
+                  <a:srgbClr val="25302A"/>
+                </a:solidFill>
+                <a:latin typeface="Noto Sans TC"/>
+                <a:ea typeface="Noto Sans TC"/>
+              </a:rPr>
+              <a:t>長期合作的小工坊。</a:t>
+            </a:r>
+          </a:p>
+        </p:txBody>
+      </p:sp>
+      <p:sp>
+        <p:nvSpPr>
+          <p:cNvPr id="7" name="TextBox 6"/>
+          <p:cNvSpPr txBox="1"/>
+          <p:nvPr/>
+        </p:nvSpPr>
+        <p:spPr>
+          <a:xfrm>
+            <a:off x="914400" y="4682430"/>
+            <a:ext cx="6153150" cy="291405"/>
+          </a:xfrm>
+          <a:prstGeom prst="rect">
+            <a:avLst/>
+          </a:prstGeom>
+          <a:noFill/>
+        </p:spPr>
+        <p:txBody>
+          <a:bodyPr wrap="square" lIns="0" rIns="0" tIns="0" bIns="0" anchor="t">
+            <a:spAutoFit/>
+          </a:bodyPr>
+          <a:lstStyle/>
+          <a:p>
+            <a:pPr algn="l">
+              <a:lnSpc>
+                <a:spcPts val="1995"/>
+              </a:lnSpc>
+            </a:pPr>
+            <a:r>
+              <a:rPr sz="1050" b="0">
+                <a:solidFill>
+                  <a:srgbClr val="3B5D45">
+                    <a:alpha val="85000"/>
+                  </a:srgbClr>
+                </a:solidFill>
+                <a:latin typeface="Noto Sans TC"/>
+                <a:ea typeface="Noto Sans TC"/>
+              </a:rPr>
+              <a:t>示意數字，換成你的。</a:t>
+            </a:r>
+          </a:p>
+        </p:txBody>
+      </p:sp>
+      <p:sp>
+        <p:nvSpPr>
+          <p:cNvPr id="8" name="TextBox 7"/>
           <p:cNvSpPr txBox="1"/>
           <p:nvPr/>
         </p:nvSpPr>
@@ -7748,278 +8235,7 @@
       </p:pic>
       <p:sp>
         <p:nvSpPr>
-          <p:cNvPr id="3" name="Rectangle 2"/>
-          <p:cNvSpPr/>
-          <p:nvPr/>
-        </p:nvSpPr>
-        <p:spPr>
-          <a:xfrm>
-            <a:off x="914400" y="2886967"/>
-            <a:ext cx="3200400" cy="1807815"/>
-          </a:xfrm>
-          <a:prstGeom prst="rect">
-            <a:avLst/>
-          </a:prstGeom>
-          <a:noFill/>
-          <a:ln>
-            <a:noFill/>
-          </a:ln>
-          <a:effectLst/>
-        </p:spPr>
-        <p:style>
-          <a:lnRef idx="1">
-            <a:schemeClr val="accent1"/>
-          </a:lnRef>
-          <a:fillRef idx="3">
-            <a:schemeClr val="accent1"/>
-          </a:fillRef>
-          <a:effectRef idx="2">
-            <a:schemeClr val="accent1"/>
-          </a:effectRef>
-          <a:fontRef idx="minor">
-            <a:schemeClr val="lt1"/>
-          </a:fontRef>
-        </p:style>
-        <p:txBody>
-          <a:bodyPr rtlCol="0" anchor="ctr"/>
-          <a:lstStyle/>
-          <a:p/>
-        </p:txBody>
-      </p:sp>
-      <p:cxnSp>
-        <p:nvCxnSpPr>
-          <p:cNvPr id="4" name="Connector 3"/>
-          <p:cNvCxnSpPr/>
-          <p:nvPr/>
-        </p:nvCxnSpPr>
-        <p:spPr>
-          <a:xfrm>
-            <a:off x="914400" y="2886967"/>
-            <a:ext cx="0" cy="1807816"/>
-          </a:xfrm>
-          <a:prstGeom prst="line">
-            <a:avLst/>
-          </a:prstGeom>
-          <a:ln w="9525">
-            <a:solidFill>
-              <a:srgbClr val="3B5D45">
-                <a:alpha val="50000"/>
-              </a:srgbClr>
-            </a:solidFill>
-          </a:ln>
-        </p:spPr>
-        <p:style>
-          <a:lnRef idx="2">
-            <a:schemeClr val="accent1"/>
-          </a:lnRef>
-          <a:fillRef idx="0">
-            <a:schemeClr val="accent1"/>
-          </a:fillRef>
-          <a:effectRef idx="1">
-            <a:schemeClr val="accent1"/>
-          </a:effectRef>
-          <a:fontRef idx="minor">
-            <a:schemeClr val="tx1"/>
-          </a:fontRef>
-        </p:style>
-      </p:cxnSp>
-      <p:sp>
-        <p:nvSpPr>
-          <p:cNvPr id="5" name="Rectangle 4"/>
-          <p:cNvSpPr/>
-          <p:nvPr/>
-        </p:nvSpPr>
-        <p:spPr>
-          <a:xfrm>
-            <a:off x="4495800" y="2886967"/>
-            <a:ext cx="3200400" cy="1807815"/>
-          </a:xfrm>
-          <a:prstGeom prst="rect">
-            <a:avLst/>
-          </a:prstGeom>
-          <a:noFill/>
-          <a:ln>
-            <a:noFill/>
-          </a:ln>
-          <a:effectLst/>
-        </p:spPr>
-        <p:style>
-          <a:lnRef idx="1">
-            <a:schemeClr val="accent1"/>
-          </a:lnRef>
-          <a:fillRef idx="3">
-            <a:schemeClr val="accent1"/>
-          </a:fillRef>
-          <a:effectRef idx="2">
-            <a:schemeClr val="accent1"/>
-          </a:effectRef>
-          <a:fontRef idx="minor">
-            <a:schemeClr val="lt1"/>
-          </a:fontRef>
-        </p:style>
-        <p:txBody>
-          <a:bodyPr rtlCol="0" anchor="ctr"/>
-          <a:lstStyle/>
-          <a:p/>
-        </p:txBody>
-      </p:sp>
-      <p:cxnSp>
-        <p:nvCxnSpPr>
-          <p:cNvPr id="6" name="Connector 5"/>
-          <p:cNvCxnSpPr/>
-          <p:nvPr/>
-        </p:nvCxnSpPr>
-        <p:spPr>
-          <a:xfrm>
-            <a:off x="4495800" y="2886967"/>
-            <a:ext cx="0" cy="1807816"/>
-          </a:xfrm>
-          <a:prstGeom prst="line">
-            <a:avLst/>
-          </a:prstGeom>
-          <a:ln w="9525">
-            <a:solidFill>
-              <a:srgbClr val="3B5D45">
-                <a:alpha val="50000"/>
-              </a:srgbClr>
-            </a:solidFill>
-          </a:ln>
-        </p:spPr>
-        <p:style>
-          <a:lnRef idx="2">
-            <a:schemeClr val="accent1"/>
-          </a:lnRef>
-          <a:fillRef idx="0">
-            <a:schemeClr val="accent1"/>
-          </a:fillRef>
-          <a:effectRef idx="1">
-            <a:schemeClr val="accent1"/>
-          </a:effectRef>
-          <a:fontRef idx="minor">
-            <a:schemeClr val="tx1"/>
-          </a:fontRef>
-        </p:style>
-      </p:cxnSp>
-      <p:sp>
-        <p:nvSpPr>
-          <p:cNvPr id="7" name="Rectangle 6"/>
-          <p:cNvSpPr/>
-          <p:nvPr/>
-        </p:nvSpPr>
-        <p:spPr>
-          <a:xfrm>
-            <a:off x="8077200" y="2886967"/>
-            <a:ext cx="3200400" cy="1807815"/>
-          </a:xfrm>
-          <a:prstGeom prst="rect">
-            <a:avLst/>
-          </a:prstGeom>
-          <a:noFill/>
-          <a:ln>
-            <a:noFill/>
-          </a:ln>
-          <a:effectLst/>
-        </p:spPr>
-        <p:style>
-          <a:lnRef idx="1">
-            <a:schemeClr val="accent1"/>
-          </a:lnRef>
-          <a:fillRef idx="3">
-            <a:schemeClr val="accent1"/>
-          </a:fillRef>
-          <a:effectRef idx="2">
-            <a:schemeClr val="accent1"/>
-          </a:effectRef>
-          <a:fontRef idx="minor">
-            <a:schemeClr val="lt1"/>
-          </a:fontRef>
-        </p:style>
-        <p:txBody>
-          <a:bodyPr rtlCol="0" anchor="ctr"/>
-          <a:lstStyle/>
-          <a:p/>
-        </p:txBody>
-      </p:sp>
-      <p:cxnSp>
-        <p:nvCxnSpPr>
-          <p:cNvPr id="8" name="Connector 7"/>
-          <p:cNvCxnSpPr/>
-          <p:nvPr/>
-        </p:nvCxnSpPr>
-        <p:spPr>
-          <a:xfrm>
-            <a:off x="8077200" y="2886967"/>
-            <a:ext cx="0" cy="1807816"/>
-          </a:xfrm>
-          <a:prstGeom prst="line">
-            <a:avLst/>
-          </a:prstGeom>
-          <a:ln w="9525">
-            <a:solidFill>
-              <a:srgbClr val="3B5D45">
-                <a:alpha val="50000"/>
-              </a:srgbClr>
-            </a:solidFill>
-          </a:ln>
-        </p:spPr>
-        <p:style>
-          <a:lnRef idx="2">
-            <a:schemeClr val="accent1"/>
-          </a:lnRef>
-          <a:fillRef idx="0">
-            <a:schemeClr val="accent1"/>
-          </a:fillRef>
-          <a:effectRef idx="1">
-            <a:schemeClr val="accent1"/>
-          </a:effectRef>
-          <a:fontRef idx="minor">
-            <a:schemeClr val="tx1"/>
-          </a:fontRef>
-        </p:style>
-      </p:cxnSp>
-      <p:sp>
-        <p:nvSpPr>
-          <p:cNvPr id="9" name="TextBox 8"/>
-          <p:cNvSpPr txBox="1"/>
-          <p:nvPr/>
-        </p:nvSpPr>
-        <p:spPr>
-          <a:xfrm>
-            <a:off x="914400" y="533400"/>
-            <a:ext cx="1388417" cy="200025"/>
-          </a:xfrm>
-          <a:prstGeom prst="rect">
-            <a:avLst/>
-          </a:prstGeom>
-          <a:noFill/>
-        </p:spPr>
-        <p:txBody>
-          <a:bodyPr wrap="square" lIns="0" rIns="0" tIns="0" bIns="0" anchor="t">
-            <a:spAutoFit/>
-          </a:bodyPr>
-          <a:lstStyle/>
-          <a:p>
-            <a:pPr algn="l">
-              <a:lnSpc>
-                <a:spcPts val="1275"/>
-              </a:lnSpc>
-            </a:pPr>
-            <a:r>
-              <a:rPr sz="900" b="0" spc="179">
-                <a:solidFill>
-                  <a:srgbClr val="3B5D45"/>
-                </a:solidFill>
-                <a:latin typeface="Noto Sans TC"/>
-                <a:ea typeface="Noto Sans TC"/>
-              </a:rPr>
-              <a:t>山徑選物 · 品牌故事</a:t>
-            </a:r>
-          </a:p>
-        </p:txBody>
-      </p:sp>
-      <p:sp>
-        <p:nvSpPr>
-          <p:cNvPr id="10" name="TextBox 9"/>
+          <p:cNvPr id="3" name="TextBox 2"/>
           <p:cNvSpPr txBox="1"/>
           <p:nvPr/>
         </p:nvSpPr>
@@ -8059,407 +8275,89 @@
       </p:sp>
       <p:sp>
         <p:nvSpPr>
-          <p:cNvPr id="11" name="TextBox 10"/>
-          <p:cNvSpPr txBox="1"/>
-          <p:nvPr/>
-        </p:nvSpPr>
-        <p:spPr>
-          <a:xfrm>
-            <a:off x="914400" y="914400"/>
-            <a:ext cx="10420350" cy="533400"/>
-          </a:xfrm>
-          <a:prstGeom prst="rect">
-            <a:avLst/>
-          </a:prstGeom>
-          <a:noFill/>
-        </p:spPr>
-        <p:txBody>
-          <a:bodyPr wrap="square" lIns="0" rIns="0" tIns="0" bIns="0" anchor="t">
-            <a:spAutoFit/>
-          </a:bodyPr>
-          <a:lstStyle/>
-          <a:p>
-            <a:pPr algn="l">
-              <a:lnSpc>
-                <a:spcPts val="3900"/>
-              </a:lnSpc>
-            </a:pPr>
-            <a:r>
-              <a:rPr sz="3000" b="0">
-                <a:solidFill>
-                  <a:srgbClr val="3B5D45"/>
+          <p:cNvPr id="4" name="TextBox 3"/>
+          <p:cNvSpPr txBox="1"/>
+          <p:nvPr/>
+        </p:nvSpPr>
+        <p:spPr>
+          <a:xfrm>
+            <a:off x="914400" y="2472630"/>
+            <a:ext cx="10420350" cy="1181100"/>
+          </a:xfrm>
+          <a:prstGeom prst="rect">
+            <a:avLst/>
+          </a:prstGeom>
+          <a:noFill/>
+        </p:spPr>
+        <p:txBody>
+          <a:bodyPr wrap="square" lIns="0" rIns="0" tIns="0" bIns="0" anchor="t">
+            <a:spAutoFit/>
+          </a:bodyPr>
+          <a:lstStyle/>
+          <a:p>
+            <a:pPr algn="l">
+              <a:lnSpc>
+                <a:spcPts val="9000"/>
+              </a:lnSpc>
+            </a:pPr>
+            <a:r>
+              <a:rPr sz="9000" b="0">
+                <a:solidFill>
+                  <a:srgbClr val="3B5D45">
+                    <a:alpha val="35000"/>
+                  </a:srgbClr>
                 </a:solidFill>
                 <a:latin typeface="LXGW WenKai TC"/>
                 <a:ea typeface="LXGW WenKai TC"/>
               </a:rPr>
-              <a:t>三步開始</a:t>
-            </a:r>
-          </a:p>
-        </p:txBody>
-      </p:sp>
-      <p:sp>
-        <p:nvSpPr>
-          <p:cNvPr id="12" name="TextBox 11"/>
-          <p:cNvSpPr txBox="1"/>
-          <p:nvPr/>
-        </p:nvSpPr>
-        <p:spPr>
-          <a:xfrm>
-            <a:off x="1152525" y="3153667"/>
-            <a:ext cx="2714625" cy="419100"/>
-          </a:xfrm>
-          <a:prstGeom prst="rect">
-            <a:avLst/>
-          </a:prstGeom>
-          <a:noFill/>
-        </p:spPr>
-        <p:txBody>
-          <a:bodyPr wrap="square" lIns="0" rIns="0" tIns="0" bIns="0" anchor="t">
-            <a:spAutoFit/>
-          </a:bodyPr>
-          <a:lstStyle/>
-          <a:p>
-            <a:pPr algn="l">
-              <a:lnSpc>
-                <a:spcPts val="3000"/>
-              </a:lnSpc>
-            </a:pPr>
-            <a:r>
-              <a:rPr sz="3000" b="0">
-                <a:solidFill>
-                  <a:srgbClr val="B0603A"/>
+              <a:t>02</a:t>
+            </a:r>
+          </a:p>
+        </p:txBody>
+      </p:sp>
+      <p:sp>
+        <p:nvSpPr>
+          <p:cNvPr id="5" name="TextBox 4"/>
+          <p:cNvSpPr txBox="1"/>
+          <p:nvPr/>
+        </p:nvSpPr>
+        <p:spPr>
+          <a:xfrm>
+            <a:off x="914400" y="3691830"/>
+            <a:ext cx="10420350" cy="731490"/>
+          </a:xfrm>
+          <a:prstGeom prst="rect">
+            <a:avLst/>
+          </a:prstGeom>
+          <a:noFill/>
+        </p:spPr>
+        <p:txBody>
+          <a:bodyPr wrap="square" lIns="0" rIns="0" tIns="0" bIns="0" anchor="t">
+            <a:spAutoFit/>
+          </a:bodyPr>
+          <a:lstStyle/>
+          <a:p>
+            <a:pPr algn="l">
+              <a:lnSpc>
+                <a:spcPts val="5459"/>
+              </a:lnSpc>
+            </a:pPr>
+            <a:r>
+              <a:rPr sz="4200" b="0">
+                <a:solidFill>
+                  <a:srgbClr val="3B5D45"/>
                 </a:solidFill>
                 <a:latin typeface="LXGW WenKai TC"/>
                 <a:ea typeface="LXGW WenKai TC"/>
               </a:rPr>
-              <a:t>01</a:t>
-            </a:r>
-          </a:p>
-        </p:txBody>
-      </p:sp>
-      <p:sp>
-        <p:nvSpPr>
-          <p:cNvPr id="13" name="TextBox 12"/>
-          <p:cNvSpPr txBox="1"/>
-          <p:nvPr/>
-        </p:nvSpPr>
-        <p:spPr>
-          <a:xfrm>
-            <a:off x="1152525" y="3668017"/>
-            <a:ext cx="2714625" cy="342900"/>
-          </a:xfrm>
-          <a:prstGeom prst="rect">
-            <a:avLst/>
-          </a:prstGeom>
-          <a:noFill/>
-        </p:spPr>
-        <p:txBody>
-          <a:bodyPr wrap="square" lIns="0" rIns="0" tIns="0" bIns="0" anchor="t">
-            <a:spAutoFit/>
-          </a:bodyPr>
-          <a:lstStyle/>
-          <a:p>
-            <a:pPr algn="l">
-              <a:lnSpc>
-                <a:spcPts val="2400"/>
-              </a:lnSpc>
-            </a:pPr>
-            <a:r>
-              <a:rPr sz="1650" b="0">
-                <a:solidFill>
-                  <a:srgbClr val="3B5D45"/>
-                </a:solidFill>
-                <a:latin typeface="Noto Sans TC"/>
-                <a:ea typeface="Noto Sans TC"/>
-              </a:rPr>
-              <a:t>看樣</a:t>
-            </a:r>
-          </a:p>
-        </p:txBody>
-      </p:sp>
-      <p:sp>
-        <p:nvSpPr>
-          <p:cNvPr id="14" name="TextBox 13"/>
-          <p:cNvSpPr txBox="1"/>
-          <p:nvPr/>
-        </p:nvSpPr>
-        <p:spPr>
-          <a:xfrm>
-            <a:off x="1152525" y="4029967"/>
-            <a:ext cx="2714625" cy="436215"/>
-          </a:xfrm>
-          <a:prstGeom prst="rect">
-            <a:avLst/>
-          </a:prstGeom>
-          <a:noFill/>
-        </p:spPr>
-        <p:txBody>
-          <a:bodyPr wrap="square" lIns="0" rIns="0" tIns="0" bIns="0" anchor="t">
-            <a:spAutoFit/>
-          </a:bodyPr>
-          <a:lstStyle/>
-          <a:p>
-            <a:pPr algn="l">
-              <a:lnSpc>
-                <a:spcPts val="3135"/>
-              </a:lnSpc>
-            </a:pPr>
-            <a:r>
-              <a:rPr sz="1650" b="0">
-                <a:solidFill>
-                  <a:srgbClr val="25302A"/>
-                </a:solidFill>
-                <a:latin typeface="Noto Sans TC"/>
-                <a:ea typeface="Noto Sans TC"/>
-              </a:rPr>
-              <a:t>先寄三件到店裡。</a:t>
-            </a:r>
-          </a:p>
-        </p:txBody>
-      </p:sp>
-      <p:sp>
-        <p:nvSpPr>
-          <p:cNvPr id="15" name="TextBox 14"/>
-          <p:cNvSpPr txBox="1"/>
-          <p:nvPr/>
-        </p:nvSpPr>
-        <p:spPr>
-          <a:xfrm>
-            <a:off x="4733925" y="3153667"/>
-            <a:ext cx="2714625" cy="419100"/>
-          </a:xfrm>
-          <a:prstGeom prst="rect">
-            <a:avLst/>
-          </a:prstGeom>
-          <a:noFill/>
-        </p:spPr>
-        <p:txBody>
-          <a:bodyPr wrap="square" lIns="0" rIns="0" tIns="0" bIns="0" anchor="t">
-            <a:spAutoFit/>
-          </a:bodyPr>
-          <a:lstStyle/>
-          <a:p>
-            <a:pPr algn="l">
-              <a:lnSpc>
-                <a:spcPts val="3000"/>
-              </a:lnSpc>
-            </a:pPr>
-            <a:r>
-              <a:rPr sz="3000" b="0">
-                <a:solidFill>
-                  <a:srgbClr val="B0603A"/>
-                </a:solidFill>
-                <a:latin typeface="LXGW WenKai TC"/>
-                <a:ea typeface="LXGW WenKai TC"/>
-              </a:rPr>
-              <a:t>02</a:t>
-            </a:r>
-          </a:p>
-        </p:txBody>
-      </p:sp>
-      <p:sp>
-        <p:nvSpPr>
-          <p:cNvPr id="16" name="TextBox 15"/>
-          <p:cNvSpPr txBox="1"/>
-          <p:nvPr/>
-        </p:nvSpPr>
-        <p:spPr>
-          <a:xfrm>
-            <a:off x="4733925" y="3668017"/>
-            <a:ext cx="2714625" cy="342900"/>
-          </a:xfrm>
-          <a:prstGeom prst="rect">
-            <a:avLst/>
-          </a:prstGeom>
-          <a:noFill/>
-        </p:spPr>
-        <p:txBody>
-          <a:bodyPr wrap="square" lIns="0" rIns="0" tIns="0" bIns="0" anchor="t">
-            <a:spAutoFit/>
-          </a:bodyPr>
-          <a:lstStyle/>
-          <a:p>
-            <a:pPr algn="l">
-              <a:lnSpc>
-                <a:spcPts val="2400"/>
-              </a:lnSpc>
-            </a:pPr>
-            <a:r>
-              <a:rPr sz="1650" b="0">
-                <a:solidFill>
-                  <a:srgbClr val="3B5D45"/>
-                </a:solidFill>
-                <a:latin typeface="Noto Sans TC"/>
-                <a:ea typeface="Noto Sans TC"/>
-              </a:rPr>
-              <a:t>選件</a:t>
-            </a:r>
-          </a:p>
-        </p:txBody>
-      </p:sp>
-      <p:sp>
-        <p:nvSpPr>
-          <p:cNvPr id="17" name="TextBox 16"/>
-          <p:cNvSpPr txBox="1"/>
-          <p:nvPr/>
-        </p:nvSpPr>
-        <p:spPr>
-          <a:xfrm>
-            <a:off x="4733925" y="4029967"/>
-            <a:ext cx="2714625" cy="436215"/>
-          </a:xfrm>
-          <a:prstGeom prst="rect">
-            <a:avLst/>
-          </a:prstGeom>
-          <a:noFill/>
-        </p:spPr>
-        <p:txBody>
-          <a:bodyPr wrap="square" lIns="0" rIns="0" tIns="0" bIns="0" anchor="t">
-            <a:spAutoFit/>
-          </a:bodyPr>
-          <a:lstStyle/>
-          <a:p>
-            <a:pPr algn="l">
-              <a:lnSpc>
-                <a:spcPts val="3135"/>
-              </a:lnSpc>
-            </a:pPr>
-            <a:r>
-              <a:rPr sz="1650" b="0">
-                <a:solidFill>
-                  <a:srgbClr val="25302A"/>
-                </a:solidFill>
-                <a:latin typeface="Noto Sans TC"/>
-                <a:ea typeface="Noto Sans TC"/>
-              </a:rPr>
-              <a:t>挑跟你的空間合的。</a:t>
-            </a:r>
-          </a:p>
-        </p:txBody>
-      </p:sp>
-      <p:sp>
-        <p:nvSpPr>
-          <p:cNvPr id="18" name="TextBox 17"/>
-          <p:cNvSpPr txBox="1"/>
-          <p:nvPr/>
-        </p:nvSpPr>
-        <p:spPr>
-          <a:xfrm>
-            <a:off x="8315325" y="3153667"/>
-            <a:ext cx="2714625" cy="419100"/>
-          </a:xfrm>
-          <a:prstGeom prst="rect">
-            <a:avLst/>
-          </a:prstGeom>
-          <a:noFill/>
-        </p:spPr>
-        <p:txBody>
-          <a:bodyPr wrap="square" lIns="0" rIns="0" tIns="0" bIns="0" anchor="t">
-            <a:spAutoFit/>
-          </a:bodyPr>
-          <a:lstStyle/>
-          <a:p>
-            <a:pPr algn="l">
-              <a:lnSpc>
-                <a:spcPts val="3000"/>
-              </a:lnSpc>
-            </a:pPr>
-            <a:r>
-              <a:rPr sz="3000" b="0">
-                <a:solidFill>
-                  <a:srgbClr val="B0603A"/>
-                </a:solidFill>
-                <a:latin typeface="LXGW WenKai TC"/>
-                <a:ea typeface="LXGW WenKai TC"/>
-              </a:rPr>
-              <a:t>03</a:t>
-            </a:r>
-          </a:p>
-        </p:txBody>
-      </p:sp>
-      <p:sp>
-        <p:nvSpPr>
-          <p:cNvPr id="19" name="TextBox 18"/>
-          <p:cNvSpPr txBox="1"/>
-          <p:nvPr/>
-        </p:nvSpPr>
-        <p:spPr>
-          <a:xfrm>
-            <a:off x="8315325" y="3668017"/>
-            <a:ext cx="2714625" cy="342900"/>
-          </a:xfrm>
-          <a:prstGeom prst="rect">
-            <a:avLst/>
-          </a:prstGeom>
-          <a:noFill/>
-        </p:spPr>
-        <p:txBody>
-          <a:bodyPr wrap="square" lIns="0" rIns="0" tIns="0" bIns="0" anchor="t">
-            <a:spAutoFit/>
-          </a:bodyPr>
-          <a:lstStyle/>
-          <a:p>
-            <a:pPr algn="l">
-              <a:lnSpc>
-                <a:spcPts val="2400"/>
-              </a:lnSpc>
-            </a:pPr>
-            <a:r>
-              <a:rPr sz="1650" b="0">
-                <a:solidFill>
-                  <a:srgbClr val="3B5D45"/>
-                </a:solidFill>
-                <a:latin typeface="Noto Sans TC"/>
-                <a:ea typeface="Noto Sans TC"/>
-              </a:rPr>
-              <a:t>上架</a:t>
-            </a:r>
-          </a:p>
-        </p:txBody>
-      </p:sp>
-      <p:sp>
-        <p:nvSpPr>
-          <p:cNvPr id="20" name="TextBox 19"/>
-          <p:cNvSpPr txBox="1"/>
-          <p:nvPr/>
-        </p:nvSpPr>
-        <p:spPr>
-          <a:xfrm>
-            <a:off x="8315325" y="4029967"/>
-            <a:ext cx="2714625" cy="436215"/>
-          </a:xfrm>
-          <a:prstGeom prst="rect">
-            <a:avLst/>
-          </a:prstGeom>
-          <a:noFill/>
-        </p:spPr>
-        <p:txBody>
-          <a:bodyPr wrap="square" lIns="0" rIns="0" tIns="0" bIns="0" anchor="t">
-            <a:spAutoFit/>
-          </a:bodyPr>
-          <a:lstStyle/>
-          <a:p>
-            <a:pPr algn="l">
-              <a:lnSpc>
-                <a:spcPts val="3135"/>
-              </a:lnSpc>
-            </a:pPr>
-            <a:r>
-              <a:rPr sz="1650" b="0">
-                <a:solidFill>
-                  <a:srgbClr val="25302A"/>
-                </a:solidFill>
-                <a:latin typeface="Noto Sans TC"/>
-                <a:ea typeface="Noto Sans TC"/>
-              </a:rPr>
-              <a:t>寄售或買斷，你選。</a:t>
-            </a:r>
-          </a:p>
-        </p:txBody>
-      </p:sp>
-      <p:sp>
-        <p:nvSpPr>
-          <p:cNvPr id="21" name="TextBox 20"/>
+              <a:t>合作</a:t>
+            </a:r>
+          </a:p>
+        </p:txBody>
+      </p:sp>
+      <p:sp>
+        <p:nvSpPr>
+          <p:cNvPr id="6" name="TextBox 5"/>
           <p:cNvSpPr txBox="1"/>
           <p:nvPr/>
         </p:nvSpPr>
@@ -8541,7 +8439,238 @@
       </p:pic>
       <p:sp>
         <p:nvSpPr>
-          <p:cNvPr id="3" name="TextBox 2"/>
+          <p:cNvPr id="3" name="Rectangle 2"/>
+          <p:cNvSpPr/>
+          <p:nvPr/>
+        </p:nvSpPr>
+        <p:spPr>
+          <a:xfrm>
+            <a:off x="914400" y="2886967"/>
+            <a:ext cx="3200400" cy="1807815"/>
+          </a:xfrm>
+          <a:prstGeom prst="rect">
+            <a:avLst/>
+          </a:prstGeom>
+          <a:noFill/>
+          <a:ln>
+            <a:noFill/>
+          </a:ln>
+          <a:effectLst/>
+        </p:spPr>
+        <p:style>
+          <a:lnRef idx="1">
+            <a:schemeClr val="accent1"/>
+          </a:lnRef>
+          <a:fillRef idx="3">
+            <a:schemeClr val="accent1"/>
+          </a:fillRef>
+          <a:effectRef idx="2">
+            <a:schemeClr val="accent1"/>
+          </a:effectRef>
+          <a:fontRef idx="minor">
+            <a:schemeClr val="lt1"/>
+          </a:fontRef>
+        </p:style>
+        <p:txBody>
+          <a:bodyPr rtlCol="0" anchor="ctr"/>
+          <a:lstStyle/>
+          <a:p/>
+        </p:txBody>
+      </p:sp>
+      <p:cxnSp>
+        <p:nvCxnSpPr>
+          <p:cNvPr id="4" name="Connector 3"/>
+          <p:cNvCxnSpPr/>
+          <p:nvPr/>
+        </p:nvCxnSpPr>
+        <p:spPr>
+          <a:xfrm>
+            <a:off x="914400" y="2886967"/>
+            <a:ext cx="0" cy="1807816"/>
+          </a:xfrm>
+          <a:prstGeom prst="line">
+            <a:avLst/>
+          </a:prstGeom>
+          <a:ln w="9525">
+            <a:solidFill>
+              <a:srgbClr val="3B5D45">
+                <a:alpha val="50000"/>
+              </a:srgbClr>
+            </a:solidFill>
+          </a:ln>
+        </p:spPr>
+        <p:style>
+          <a:lnRef idx="2">
+            <a:schemeClr val="accent1"/>
+          </a:lnRef>
+          <a:fillRef idx="0">
+            <a:schemeClr val="accent1"/>
+          </a:fillRef>
+          <a:effectRef idx="1">
+            <a:schemeClr val="accent1"/>
+          </a:effectRef>
+          <a:fontRef idx="minor">
+            <a:schemeClr val="tx1"/>
+          </a:fontRef>
+        </p:style>
+      </p:cxnSp>
+      <p:sp>
+        <p:nvSpPr>
+          <p:cNvPr id="5" name="Rectangle 4"/>
+          <p:cNvSpPr/>
+          <p:nvPr/>
+        </p:nvSpPr>
+        <p:spPr>
+          <a:xfrm>
+            <a:off x="4495800" y="2886967"/>
+            <a:ext cx="3200400" cy="1807815"/>
+          </a:xfrm>
+          <a:prstGeom prst="rect">
+            <a:avLst/>
+          </a:prstGeom>
+          <a:noFill/>
+          <a:ln>
+            <a:noFill/>
+          </a:ln>
+          <a:effectLst/>
+        </p:spPr>
+        <p:style>
+          <a:lnRef idx="1">
+            <a:schemeClr val="accent1"/>
+          </a:lnRef>
+          <a:fillRef idx="3">
+            <a:schemeClr val="accent1"/>
+          </a:fillRef>
+          <a:effectRef idx="2">
+            <a:schemeClr val="accent1"/>
+          </a:effectRef>
+          <a:fontRef idx="minor">
+            <a:schemeClr val="lt1"/>
+          </a:fontRef>
+        </p:style>
+        <p:txBody>
+          <a:bodyPr rtlCol="0" anchor="ctr"/>
+          <a:lstStyle/>
+          <a:p/>
+        </p:txBody>
+      </p:sp>
+      <p:cxnSp>
+        <p:nvCxnSpPr>
+          <p:cNvPr id="6" name="Connector 5"/>
+          <p:cNvCxnSpPr/>
+          <p:nvPr/>
+        </p:nvCxnSpPr>
+        <p:spPr>
+          <a:xfrm>
+            <a:off x="4495800" y="2886967"/>
+            <a:ext cx="0" cy="1807816"/>
+          </a:xfrm>
+          <a:prstGeom prst="line">
+            <a:avLst/>
+          </a:prstGeom>
+          <a:ln w="9525">
+            <a:solidFill>
+              <a:srgbClr val="3B5D45">
+                <a:alpha val="50000"/>
+              </a:srgbClr>
+            </a:solidFill>
+          </a:ln>
+        </p:spPr>
+        <p:style>
+          <a:lnRef idx="2">
+            <a:schemeClr val="accent1"/>
+          </a:lnRef>
+          <a:fillRef idx="0">
+            <a:schemeClr val="accent1"/>
+          </a:fillRef>
+          <a:effectRef idx="1">
+            <a:schemeClr val="accent1"/>
+          </a:effectRef>
+          <a:fontRef idx="minor">
+            <a:schemeClr val="tx1"/>
+          </a:fontRef>
+        </p:style>
+      </p:cxnSp>
+      <p:sp>
+        <p:nvSpPr>
+          <p:cNvPr id="7" name="Rectangle 6"/>
+          <p:cNvSpPr/>
+          <p:nvPr/>
+        </p:nvSpPr>
+        <p:spPr>
+          <a:xfrm>
+            <a:off x="8077200" y="2886967"/>
+            <a:ext cx="3200400" cy="1807815"/>
+          </a:xfrm>
+          <a:prstGeom prst="rect">
+            <a:avLst/>
+          </a:prstGeom>
+          <a:noFill/>
+          <a:ln>
+            <a:noFill/>
+          </a:ln>
+          <a:effectLst/>
+        </p:spPr>
+        <p:style>
+          <a:lnRef idx="1">
+            <a:schemeClr val="accent1"/>
+          </a:lnRef>
+          <a:fillRef idx="3">
+            <a:schemeClr val="accent1"/>
+          </a:fillRef>
+          <a:effectRef idx="2">
+            <a:schemeClr val="accent1"/>
+          </a:effectRef>
+          <a:fontRef idx="minor">
+            <a:schemeClr val="lt1"/>
+          </a:fontRef>
+        </p:style>
+        <p:txBody>
+          <a:bodyPr rtlCol="0" anchor="ctr"/>
+          <a:lstStyle/>
+          <a:p/>
+        </p:txBody>
+      </p:sp>
+      <p:cxnSp>
+        <p:nvCxnSpPr>
+          <p:cNvPr id="8" name="Connector 7"/>
+          <p:cNvCxnSpPr/>
+          <p:nvPr/>
+        </p:nvCxnSpPr>
+        <p:spPr>
+          <a:xfrm>
+            <a:off x="8077200" y="2886967"/>
+            <a:ext cx="0" cy="1807816"/>
+          </a:xfrm>
+          <a:prstGeom prst="line">
+            <a:avLst/>
+          </a:prstGeom>
+          <a:ln w="9525">
+            <a:solidFill>
+              <a:srgbClr val="3B5D45">
+                <a:alpha val="50000"/>
+              </a:srgbClr>
+            </a:solidFill>
+          </a:ln>
+        </p:spPr>
+        <p:style>
+          <a:lnRef idx="2">
+            <a:schemeClr val="accent1"/>
+          </a:lnRef>
+          <a:fillRef idx="0">
+            <a:schemeClr val="accent1"/>
+          </a:fillRef>
+          <a:effectRef idx="1">
+            <a:schemeClr val="accent1"/>
+          </a:effectRef>
+          <a:fontRef idx="minor">
+            <a:schemeClr val="tx1"/>
+          </a:fontRef>
+        </p:style>
+      </p:cxnSp>
+      <p:sp>
+        <p:nvSpPr>
+          <p:cNvPr id="9" name="TextBox 8"/>
           <p:cNvSpPr txBox="1"/>
           <p:nvPr/>
         </p:nvSpPr>
@@ -8581,7 +8710,7 @@
       </p:sp>
       <p:sp>
         <p:nvSpPr>
-          <p:cNvPr id="4" name="TextBox 3"/>
+          <p:cNvPr id="10" name="TextBox 9"/>
           <p:cNvSpPr txBox="1"/>
           <p:nvPr/>
         </p:nvSpPr>
@@ -8621,13 +8750,13 @@
       </p:sp>
       <p:sp>
         <p:nvSpPr>
-          <p:cNvPr id="5" name="TextBox 4"/>
-          <p:cNvSpPr txBox="1"/>
-          <p:nvPr/>
-        </p:nvSpPr>
-        <p:spPr>
-          <a:xfrm>
-            <a:off x="914400" y="2829817"/>
+          <p:cNvPr id="11" name="TextBox 10"/>
+          <p:cNvSpPr txBox="1"/>
+          <p:nvPr/>
+        </p:nvSpPr>
+        <p:spPr>
+          <a:xfrm>
+            <a:off x="914400" y="914400"/>
             <a:ext cx="10420350" cy="533400"/>
           </a:xfrm>
           <a:prstGeom prst="rect">
@@ -8654,36 +8783,76 @@
                 <a:latin typeface="LXGW WenKai TC"/>
                 <a:ea typeface="LXGW WenKai TC"/>
               </a:rPr>
-              <a:t>慢慢選，慢慢用。</a:t>
-            </a:r>
-          </a:p>
-        </p:txBody>
-      </p:sp>
-      <p:sp>
-        <p:nvSpPr>
-          <p:cNvPr id="6" name="TextBox 5"/>
-          <p:cNvSpPr txBox="1"/>
-          <p:nvPr/>
-        </p:nvSpPr>
-        <p:spPr>
-          <a:xfrm>
-            <a:off x="914400" y="3629917"/>
-            <a:ext cx="10420350" cy="436215"/>
-          </a:xfrm>
-          <a:prstGeom prst="rect">
-            <a:avLst/>
-          </a:prstGeom>
-          <a:noFill/>
-        </p:spPr>
-        <p:txBody>
-          <a:bodyPr wrap="square" lIns="0" rIns="0" tIns="0" bIns="0" anchor="t">
-            <a:spAutoFit/>
-          </a:bodyPr>
-          <a:lstStyle/>
-          <a:p>
-            <a:pPr algn="l">
-              <a:lnSpc>
-                <a:spcPts val="3135"/>
+              <a:t>三步開始</a:t>
+            </a:r>
+          </a:p>
+        </p:txBody>
+      </p:sp>
+      <p:sp>
+        <p:nvSpPr>
+          <p:cNvPr id="12" name="TextBox 11"/>
+          <p:cNvSpPr txBox="1"/>
+          <p:nvPr/>
+        </p:nvSpPr>
+        <p:spPr>
+          <a:xfrm>
+            <a:off x="1152525" y="3153667"/>
+            <a:ext cx="2714625" cy="419100"/>
+          </a:xfrm>
+          <a:prstGeom prst="rect">
+            <a:avLst/>
+          </a:prstGeom>
+          <a:noFill/>
+        </p:spPr>
+        <p:txBody>
+          <a:bodyPr wrap="square" lIns="0" rIns="0" tIns="0" bIns="0" anchor="t">
+            <a:spAutoFit/>
+          </a:bodyPr>
+          <a:lstStyle/>
+          <a:p>
+            <a:pPr algn="l">
+              <a:lnSpc>
+                <a:spcPts val="3000"/>
+              </a:lnSpc>
+            </a:pPr>
+            <a:r>
+              <a:rPr sz="3000" b="0">
+                <a:solidFill>
+                  <a:srgbClr val="B0603A"/>
+                </a:solidFill>
+                <a:latin typeface="LXGW WenKai TC"/>
+                <a:ea typeface="LXGW WenKai TC"/>
+              </a:rPr>
+              <a:t>01</a:t>
+            </a:r>
+          </a:p>
+        </p:txBody>
+      </p:sp>
+      <p:sp>
+        <p:nvSpPr>
+          <p:cNvPr id="13" name="TextBox 12"/>
+          <p:cNvSpPr txBox="1"/>
+          <p:nvPr/>
+        </p:nvSpPr>
+        <p:spPr>
+          <a:xfrm>
+            <a:off x="1152525" y="3668017"/>
+            <a:ext cx="2714625" cy="342900"/>
+          </a:xfrm>
+          <a:prstGeom prst="rect">
+            <a:avLst/>
+          </a:prstGeom>
+          <a:noFill/>
+        </p:spPr>
+        <p:txBody>
+          <a:bodyPr wrap="square" lIns="0" rIns="0" tIns="0" bIns="0" anchor="t">
+            <a:spAutoFit/>
+          </a:bodyPr>
+          <a:lstStyle/>
+          <a:p>
+            <a:pPr algn="l">
+              <a:lnSpc>
+                <a:spcPts val="2400"/>
               </a:lnSpc>
             </a:pPr>
             <a:r>
@@ -8694,14 +8863,294 @@
                 <a:latin typeface="Noto Sans TC"/>
                 <a:ea typeface="Noto Sans TC"/>
               </a:rPr>
-              <a:t>hello@mountaintrail.example（示意，換成你的）</a:t>
-            </a:r>
-          </a:p>
-        </p:txBody>
-      </p:sp>
-      <p:sp>
-        <p:nvSpPr>
-          <p:cNvPr id="7" name="TextBox 6"/>
+              <a:t>看樣</a:t>
+            </a:r>
+          </a:p>
+        </p:txBody>
+      </p:sp>
+      <p:sp>
+        <p:nvSpPr>
+          <p:cNvPr id="14" name="TextBox 13"/>
+          <p:cNvSpPr txBox="1"/>
+          <p:nvPr/>
+        </p:nvSpPr>
+        <p:spPr>
+          <a:xfrm>
+            <a:off x="1152525" y="4029967"/>
+            <a:ext cx="2714625" cy="436215"/>
+          </a:xfrm>
+          <a:prstGeom prst="rect">
+            <a:avLst/>
+          </a:prstGeom>
+          <a:noFill/>
+        </p:spPr>
+        <p:txBody>
+          <a:bodyPr wrap="square" lIns="0" rIns="0" tIns="0" bIns="0" anchor="t">
+            <a:spAutoFit/>
+          </a:bodyPr>
+          <a:lstStyle/>
+          <a:p>
+            <a:pPr algn="l">
+              <a:lnSpc>
+                <a:spcPts val="3135"/>
+              </a:lnSpc>
+            </a:pPr>
+            <a:r>
+              <a:rPr sz="1650" b="0">
+                <a:solidFill>
+                  <a:srgbClr val="25302A"/>
+                </a:solidFill>
+                <a:latin typeface="Noto Sans TC"/>
+                <a:ea typeface="Noto Sans TC"/>
+              </a:rPr>
+              <a:t>先寄三件到店裡。</a:t>
+            </a:r>
+          </a:p>
+        </p:txBody>
+      </p:sp>
+      <p:sp>
+        <p:nvSpPr>
+          <p:cNvPr id="15" name="TextBox 14"/>
+          <p:cNvSpPr txBox="1"/>
+          <p:nvPr/>
+        </p:nvSpPr>
+        <p:spPr>
+          <a:xfrm>
+            <a:off x="4733925" y="3153667"/>
+            <a:ext cx="2714625" cy="419100"/>
+          </a:xfrm>
+          <a:prstGeom prst="rect">
+            <a:avLst/>
+          </a:prstGeom>
+          <a:noFill/>
+        </p:spPr>
+        <p:txBody>
+          <a:bodyPr wrap="square" lIns="0" rIns="0" tIns="0" bIns="0" anchor="t">
+            <a:spAutoFit/>
+          </a:bodyPr>
+          <a:lstStyle/>
+          <a:p>
+            <a:pPr algn="l">
+              <a:lnSpc>
+                <a:spcPts val="3000"/>
+              </a:lnSpc>
+            </a:pPr>
+            <a:r>
+              <a:rPr sz="3000" b="0">
+                <a:solidFill>
+                  <a:srgbClr val="B0603A"/>
+                </a:solidFill>
+                <a:latin typeface="LXGW WenKai TC"/>
+                <a:ea typeface="LXGW WenKai TC"/>
+              </a:rPr>
+              <a:t>02</a:t>
+            </a:r>
+          </a:p>
+        </p:txBody>
+      </p:sp>
+      <p:sp>
+        <p:nvSpPr>
+          <p:cNvPr id="16" name="TextBox 15"/>
+          <p:cNvSpPr txBox="1"/>
+          <p:nvPr/>
+        </p:nvSpPr>
+        <p:spPr>
+          <a:xfrm>
+            <a:off x="4733925" y="3668017"/>
+            <a:ext cx="2714625" cy="342900"/>
+          </a:xfrm>
+          <a:prstGeom prst="rect">
+            <a:avLst/>
+          </a:prstGeom>
+          <a:noFill/>
+        </p:spPr>
+        <p:txBody>
+          <a:bodyPr wrap="square" lIns="0" rIns="0" tIns="0" bIns="0" anchor="t">
+            <a:spAutoFit/>
+          </a:bodyPr>
+          <a:lstStyle/>
+          <a:p>
+            <a:pPr algn="l">
+              <a:lnSpc>
+                <a:spcPts val="2400"/>
+              </a:lnSpc>
+            </a:pPr>
+            <a:r>
+              <a:rPr sz="1650" b="0">
+                <a:solidFill>
+                  <a:srgbClr val="3B5D45"/>
+                </a:solidFill>
+                <a:latin typeface="Noto Sans TC"/>
+                <a:ea typeface="Noto Sans TC"/>
+              </a:rPr>
+              <a:t>選件</a:t>
+            </a:r>
+          </a:p>
+        </p:txBody>
+      </p:sp>
+      <p:sp>
+        <p:nvSpPr>
+          <p:cNvPr id="17" name="TextBox 16"/>
+          <p:cNvSpPr txBox="1"/>
+          <p:nvPr/>
+        </p:nvSpPr>
+        <p:spPr>
+          <a:xfrm>
+            <a:off x="4733925" y="4029967"/>
+            <a:ext cx="2714625" cy="436215"/>
+          </a:xfrm>
+          <a:prstGeom prst="rect">
+            <a:avLst/>
+          </a:prstGeom>
+          <a:noFill/>
+        </p:spPr>
+        <p:txBody>
+          <a:bodyPr wrap="square" lIns="0" rIns="0" tIns="0" bIns="0" anchor="t">
+            <a:spAutoFit/>
+          </a:bodyPr>
+          <a:lstStyle/>
+          <a:p>
+            <a:pPr algn="l">
+              <a:lnSpc>
+                <a:spcPts val="3135"/>
+              </a:lnSpc>
+            </a:pPr>
+            <a:r>
+              <a:rPr sz="1650" b="0">
+                <a:solidFill>
+                  <a:srgbClr val="25302A"/>
+                </a:solidFill>
+                <a:latin typeface="Noto Sans TC"/>
+                <a:ea typeface="Noto Sans TC"/>
+              </a:rPr>
+              <a:t>挑跟你的空間合的。</a:t>
+            </a:r>
+          </a:p>
+        </p:txBody>
+      </p:sp>
+      <p:sp>
+        <p:nvSpPr>
+          <p:cNvPr id="18" name="TextBox 17"/>
+          <p:cNvSpPr txBox="1"/>
+          <p:nvPr/>
+        </p:nvSpPr>
+        <p:spPr>
+          <a:xfrm>
+            <a:off x="8315325" y="3153667"/>
+            <a:ext cx="2714625" cy="419100"/>
+          </a:xfrm>
+          <a:prstGeom prst="rect">
+            <a:avLst/>
+          </a:prstGeom>
+          <a:noFill/>
+        </p:spPr>
+        <p:txBody>
+          <a:bodyPr wrap="square" lIns="0" rIns="0" tIns="0" bIns="0" anchor="t">
+            <a:spAutoFit/>
+          </a:bodyPr>
+          <a:lstStyle/>
+          <a:p>
+            <a:pPr algn="l">
+              <a:lnSpc>
+                <a:spcPts val="3000"/>
+              </a:lnSpc>
+            </a:pPr>
+            <a:r>
+              <a:rPr sz="3000" b="0">
+                <a:solidFill>
+                  <a:srgbClr val="B0603A"/>
+                </a:solidFill>
+                <a:latin typeface="LXGW WenKai TC"/>
+                <a:ea typeface="LXGW WenKai TC"/>
+              </a:rPr>
+              <a:t>03</a:t>
+            </a:r>
+          </a:p>
+        </p:txBody>
+      </p:sp>
+      <p:sp>
+        <p:nvSpPr>
+          <p:cNvPr id="19" name="TextBox 18"/>
+          <p:cNvSpPr txBox="1"/>
+          <p:nvPr/>
+        </p:nvSpPr>
+        <p:spPr>
+          <a:xfrm>
+            <a:off x="8315325" y="3668017"/>
+            <a:ext cx="2714625" cy="342900"/>
+          </a:xfrm>
+          <a:prstGeom prst="rect">
+            <a:avLst/>
+          </a:prstGeom>
+          <a:noFill/>
+        </p:spPr>
+        <p:txBody>
+          <a:bodyPr wrap="square" lIns="0" rIns="0" tIns="0" bIns="0" anchor="t">
+            <a:spAutoFit/>
+          </a:bodyPr>
+          <a:lstStyle/>
+          <a:p>
+            <a:pPr algn="l">
+              <a:lnSpc>
+                <a:spcPts val="2400"/>
+              </a:lnSpc>
+            </a:pPr>
+            <a:r>
+              <a:rPr sz="1650" b="0">
+                <a:solidFill>
+                  <a:srgbClr val="3B5D45"/>
+                </a:solidFill>
+                <a:latin typeface="Noto Sans TC"/>
+                <a:ea typeface="Noto Sans TC"/>
+              </a:rPr>
+              <a:t>上架</a:t>
+            </a:r>
+          </a:p>
+        </p:txBody>
+      </p:sp>
+      <p:sp>
+        <p:nvSpPr>
+          <p:cNvPr id="20" name="TextBox 19"/>
+          <p:cNvSpPr txBox="1"/>
+          <p:nvPr/>
+        </p:nvSpPr>
+        <p:spPr>
+          <a:xfrm>
+            <a:off x="8315325" y="4029967"/>
+            <a:ext cx="2714625" cy="436215"/>
+          </a:xfrm>
+          <a:prstGeom prst="rect">
+            <a:avLst/>
+          </a:prstGeom>
+          <a:noFill/>
+        </p:spPr>
+        <p:txBody>
+          <a:bodyPr wrap="square" lIns="0" rIns="0" tIns="0" bIns="0" anchor="t">
+            <a:spAutoFit/>
+          </a:bodyPr>
+          <a:lstStyle/>
+          <a:p>
+            <a:pPr algn="l">
+              <a:lnSpc>
+                <a:spcPts val="3135"/>
+              </a:lnSpc>
+            </a:pPr>
+            <a:r>
+              <a:rPr sz="1650" b="0">
+                <a:solidFill>
+                  <a:srgbClr val="25302A"/>
+                </a:solidFill>
+                <a:latin typeface="Noto Sans TC"/>
+                <a:ea typeface="Noto Sans TC"/>
+              </a:rPr>
+              <a:t>寄售或買斷，你選。</a:t>
+            </a:r>
+          </a:p>
+        </p:txBody>
+      </p:sp>
+      <p:sp>
+        <p:nvSpPr>
+          <p:cNvPr id="21" name="TextBox 20"/>
           <p:cNvSpPr txBox="1"/>
           <p:nvPr/>
         </p:nvSpPr>
